--- a/VMUG/Connect_FL_2026/VIAdmin__to_Cloud_Admin.pptx
+++ b/VMUG/Connect_FL_2026/VIAdmin__to_Cloud_Admin.pptx
@@ -16522,6 +16522,30 @@
           </a:p>
         </p:txBody>
       </p:sp>
+      <p:pic>
+        <p:nvPicPr>
+          <p:cNvPr id="7" name="Picture 6"/>
+          <p:cNvPicPr>
+            <a:picLocks noChangeAspect="1"/>
+          </p:cNvPicPr>
+          <p:nvPr/>
+        </p:nvPicPr>
+        <p:blipFill>
+          <a:blip r:embed="rId2"/>
+          <a:stretch>
+            <a:fillRect/>
+          </a:stretch>
+        </p:blipFill>
+        <p:spPr>
+          <a:xfrm>
+            <a:off x="9085344" y="639193"/>
+            <a:ext cx="2418079" cy="2362007"/>
+          </a:xfrm>
+          <a:prstGeom prst="rect">
+            <a:avLst/>
+          </a:prstGeom>
+        </p:spPr>
+      </p:pic>
     </p:spTree>
     <p:extLst>
       <p:ext uri="{BB962C8B-B14F-4D97-AF65-F5344CB8AC3E}">
@@ -17977,6 +18001,30 @@
           </a:p>
         </p:txBody>
       </p:sp>
+      <p:pic>
+        <p:nvPicPr>
+          <p:cNvPr id="8" name="Picture 7"/>
+          <p:cNvPicPr>
+            <a:picLocks noChangeAspect="1"/>
+          </p:cNvPicPr>
+          <p:nvPr/>
+        </p:nvPicPr>
+        <p:blipFill>
+          <a:blip r:embed="rId3"/>
+          <a:stretch>
+            <a:fillRect/>
+          </a:stretch>
+        </p:blipFill>
+        <p:spPr>
+          <a:xfrm>
+            <a:off x="888108" y="3746547"/>
+            <a:ext cx="2438982" cy="2382426"/>
+          </a:xfrm>
+          <a:prstGeom prst="rect">
+            <a:avLst/>
+          </a:prstGeom>
+        </p:spPr>
+      </p:pic>
     </p:spTree>
     <p:extLst>
       <p:ext uri="{BB962C8B-B14F-4D97-AF65-F5344CB8AC3E}">
